--- a/inner_class_java.pptx
+++ b/inner_class_java.pptx
@@ -4,16 +4,16 @@
   <p:sldMasterIdLst>
     <p:sldMasterId id="2147483648" r:id="rId1"/>
   </p:sldMasterIdLst>
+  <p:notesMasterIdLst>
+    <p:notesMasterId r:id="rId6"/>
+  </p:notesMasterIdLst>
   <p:sldIdLst>
     <p:sldId id="256" r:id="rId2"/>
     <p:sldId id="257" r:id="rId3"/>
     <p:sldId id="258" r:id="rId4"/>
     <p:sldId id="259" r:id="rId5"/>
   </p:sldIdLst>
-  <p:notesMasterIdLst>
-    <p:notesMasterId r:id="rId6"/>
-  </p:notesMasterIdLst>
-  <p:sldSz cx="9144000" cy="5143500"/>
+  <p:sldSz cx="9144000" cy="5143500" type="screen16x9"/>
   <p:notesSz cx="5143500" cy="9144000"/>
   <p:defaultTextStyle>
     <a:lvl1pPr marL="0" algn="l" defTabSz="914400" rtl="0" eaLnBrk="1" latinLnBrk="0" hangingPunct="1">
@@ -107,6 +107,11 @@
       </a:defRPr>
     </a:lvl9pPr>
   </p:defaultTextStyle>
+  <p:extLst>
+    <p:ext uri="{EFAFB233-063F-42B5-8137-9DF3F51BA10A}">
+      <p15:sldGuideLst xmlns:p15="http://schemas.microsoft.com/office/powerpoint/2012/main"/>
+    </p:ext>
+  </p:extLst>
 </p:presentation>
 </file>
 
@@ -132,234 +137,10 @@
           <a:chExt cx="0" cy="0"/>
         </a:xfrm>
       </p:grpSpPr>
-      <p:sp>
-        <p:nvSpPr>
-          <p:cNvPr id="2" name="Header Placeholder 1"/>
-          <p:cNvSpPr>
-            <a:spLocks noGrp="1"/>
-          </p:cNvSpPr>
-          <p:nvPr>
-            <p:ph type="hdr" sz="quarter"/>
-          </p:nvPr>
-        </p:nvSpPr>
-        <p:spPr>
-          <a:xfrm>
-            <a:off x="0" y="0"/>
-            <a:ext cx="2971800" cy="458788"/>
-          </a:xfrm>
-          <a:prstGeom prst="rect">
-            <a:avLst/>
-          </a:prstGeom>
-        </p:spPr>
-        <p:txBody>
-          <a:bodyPr vert="horz" lIns="91440" tIns="45720" rIns="91440" bIns="45720" rtlCol="0"/>
-          <a:lstStyle>
-            <a:lvl1pPr algn="l">
-              <a:defRPr sz="1200"/>
-            </a:lvl1pPr>
-          </a:lstStyle>
-          <a:p>
-            <a:endParaRPr lang="en-US"/>
-          </a:p>
-        </p:txBody>
-      </p:sp>
-      <p:sp>
-        <p:nvSpPr>
-          <p:cNvPr id="3" name="Date Placeholder 2"/>
-          <p:cNvSpPr>
-            <a:spLocks noGrp="1"/>
-          </p:cNvSpPr>
-          <p:nvPr>
-            <p:ph type="dt" idx="1"/>
-          </p:nvPr>
-        </p:nvSpPr>
-        <p:spPr>
-          <a:xfrm>
-            <a:off x="3884613" y="0"/>
-            <a:ext cx="2971800" cy="458788"/>
-          </a:xfrm>
-          <a:prstGeom prst="rect">
-            <a:avLst/>
-          </a:prstGeom>
-        </p:spPr>
-        <p:txBody>
-          <a:bodyPr vert="horz" lIns="91440" tIns="45720" rIns="91440" bIns="45720" rtlCol="0"/>
-          <a:lstStyle>
-            <a:lvl1pPr algn="r">
-              <a:defRPr sz="1200"/>
-            </a:lvl1pPr>
-          </a:lstStyle>
-          <a:p>
-            <a:fld id="{5282F153-3F37-0F45-9E97-73ACFA13230C}" type="datetimeFigureOut">
-              <a:rPr lang="en-US"/>
-              <a:t>7/23/19</a:t>
-            </a:fld>
-            <a:endParaRPr lang="en-US"/>
-          </a:p>
-        </p:txBody>
-      </p:sp>
-      <p:sp>
-        <p:nvSpPr>
-          <p:cNvPr id="4" name="Slide Image Placeholder 3"/>
-          <p:cNvSpPr>
-            <a:spLocks noGrp="1" noRot="1" noChangeAspect="1"/>
-          </p:cNvSpPr>
-          <p:nvPr>
-            <p:ph type="sldImg" idx="2"/>
-          </p:nvPr>
-        </p:nvSpPr>
-        <p:spPr>
-          <a:xfrm>
-            <a:off x="685800" y="1143000"/>
-            <a:ext cx="5486400" cy="3086100"/>
-          </a:xfrm>
-          <a:prstGeom prst="rect">
-            <a:avLst/>
-          </a:prstGeom>
-          <a:noFill/>
-          <a:ln w="12700">
-            <a:solidFill>
-              <a:prstClr val="black"/>
-            </a:solidFill>
-          </a:ln>
-        </p:spPr>
-        <p:txBody>
-          <a:bodyPr vert="horz" lIns="91440" tIns="45720" rIns="91440" bIns="45720" rtlCol="0" anchor="ctr"/>
-          <a:lstStyle/>
-          <a:p>
-            <a:endParaRPr lang="en-US"/>
-          </a:p>
-        </p:txBody>
-      </p:sp>
-      <p:sp>
-        <p:nvSpPr>
-          <p:cNvPr id="5" name="Notes Placeholder 4"/>
-          <p:cNvSpPr>
-            <a:spLocks noGrp="1"/>
-          </p:cNvSpPr>
-          <p:nvPr>
-            <p:ph type="body" sz="quarter" idx="3"/>
-          </p:nvPr>
-        </p:nvSpPr>
-        <p:spPr>
-          <a:xfrm>
-            <a:off x="685800" y="4400550"/>
-            <a:ext cx="5486400" cy="3600450"/>
-          </a:xfrm>
-          <a:prstGeom prst="rect">
-            <a:avLst/>
-          </a:prstGeom>
-        </p:spPr>
-        <p:txBody>
-          <a:bodyPr vert="horz" lIns="91440" tIns="45720" rIns="91440" bIns="45720" rtlCol="0"/>
-          <a:lstStyle/>
-          <a:p>
-            <a:pPr lvl="0"/>
-            <a:r>
-              <a:rPr lang="en-US"/>
-              <a:t>Click to edit Master text styles</a:t>
-            </a:r>
-          </a:p>
-          <a:p>
-            <a:pPr lvl="1"/>
-            <a:r>
-              <a:rPr lang="en-US"/>
-              <a:t>Second level</a:t>
-            </a:r>
-          </a:p>
-          <a:p>
-            <a:pPr lvl="2"/>
-            <a:r>
-              <a:rPr lang="en-US"/>
-              <a:t>Third level</a:t>
-            </a:r>
-          </a:p>
-          <a:p>
-            <a:pPr lvl="3"/>
-            <a:r>
-              <a:rPr lang="en-US"/>
-              <a:t>Fourth level</a:t>
-            </a:r>
-          </a:p>
-          <a:p>
-            <a:pPr lvl="4"/>
-            <a:r>
-              <a:rPr lang="en-US"/>
-              <a:t>Fifth level</a:t>
-            </a:r>
-          </a:p>
-        </p:txBody>
-      </p:sp>
-      <p:sp>
-        <p:nvSpPr>
-          <p:cNvPr id="6" name="Footer Placeholder 5"/>
-          <p:cNvSpPr>
-            <a:spLocks noGrp="1"/>
-          </p:cNvSpPr>
-          <p:nvPr>
-            <p:ph type="ftr" sz="quarter" idx="4"/>
-          </p:nvPr>
-        </p:nvSpPr>
-        <p:spPr>
-          <a:xfrm>
-            <a:off x="0" y="8685213"/>
-            <a:ext cx="2971800" cy="458787"/>
-          </a:xfrm>
-          <a:prstGeom prst="rect">
-            <a:avLst/>
-          </a:prstGeom>
-        </p:spPr>
-        <p:txBody>
-          <a:bodyPr vert="horz" lIns="91440" tIns="45720" rIns="91440" bIns="45720" rtlCol="0" anchor="b"/>
-          <a:lstStyle>
-            <a:lvl1pPr algn="l">
-              <a:defRPr sz="1200"/>
-            </a:lvl1pPr>
-          </a:lstStyle>
-          <a:p>
-            <a:endParaRPr lang="en-US"/>
-          </a:p>
-        </p:txBody>
-      </p:sp>
-      <p:sp>
-        <p:nvSpPr>
-          <p:cNvPr id="7" name="Slide Number Placeholder 6"/>
-          <p:cNvSpPr>
-            <a:spLocks noGrp="1"/>
-          </p:cNvSpPr>
-          <p:nvPr>
-            <p:ph type="sldNum" sz="quarter" idx="5"/>
-          </p:nvPr>
-        </p:nvSpPr>
-        <p:spPr>
-          <a:xfrm>
-            <a:off x="3884613" y="8685213"/>
-            <a:ext cx="2971800" cy="458787"/>
-          </a:xfrm>
-          <a:prstGeom prst="rect">
-            <a:avLst/>
-          </a:prstGeom>
-        </p:spPr>
-        <p:txBody>
-          <a:bodyPr vert="horz" lIns="91440" tIns="45720" rIns="91440" bIns="45720" rtlCol="0" anchor="b"/>
-          <a:lstStyle>
-            <a:lvl1pPr algn="r">
-              <a:defRPr sz="1200"/>
-            </a:lvl1pPr>
-          </a:lstStyle>
-          <a:p>
-            <a:fld id="{CE5E9CC1-C706-0F49-92D6-E571CC5EEA8F}" type="slidenum">
-              <a:rPr lang="en-US"/>
-              <a:t>‹#›</a:t>
-            </a:fld>
-            <a:endParaRPr lang="en-US"/>
-          </a:p>
-        </p:txBody>
-      </p:sp>
     </p:spTree>
     <p:extLst>
       <p:ext uri="{BB962C8B-B14F-4D97-AF65-F5344CB8AC3E}">
-        <p14:creationId xmlns:p14="http://schemas.microsoft.com/office/powerpoint/2010/main" val="1024086991"/>
+        <p14:creationId xmlns:p14="http://schemas.microsoft.com/office/powerpoint/2010/main" val="124654661"/>
       </p:ext>
     </p:extLst>
   </p:cSld>
@@ -503,10 +284,6 @@
           <a:bodyPr/>
           <a:lstStyle/>
           <a:p>
-            <a:r>
-              <a:rPr lang="en-US" dirty="0"/>
-              <a:t/>
-            </a:r>
             <a:endParaRPr lang="en-US" dirty="0"/>
           </a:p>
         </p:txBody>
@@ -591,10 +368,6 @@
           <a:bodyPr/>
           <a:lstStyle/>
           <a:p>
-            <a:r>
-              <a:rPr lang="en-US" dirty="0"/>
-              <a:t/>
-            </a:r>
             <a:endParaRPr lang="en-US" dirty="0"/>
           </a:p>
         </p:txBody>
@@ -679,10 +452,6 @@
           <a:bodyPr/>
           <a:lstStyle/>
           <a:p>
-            <a:r>
-              <a:rPr lang="en-US" dirty="0"/>
-              <a:t/>
-            </a:r>
             <a:endParaRPr lang="en-US" dirty="0"/>
           </a:p>
         </p:txBody>
@@ -767,10 +536,6 @@
           <a:bodyPr/>
           <a:lstStyle/>
           <a:p>
-            <a:r>
-              <a:rPr lang="en-US" dirty="0"/>
-              <a:t/>
-            </a:r>
             <a:endParaRPr lang="en-US" dirty="0"/>
           </a:p>
         </p:txBody>
@@ -844,6 +609,11 @@
 <file path=ppt/slideMasters/slideMaster1.xml><?xml version="1.0" encoding="utf-8"?>
 <p:sldMaster xmlns:a="http://schemas.openxmlformats.org/drawingml/2006/main" xmlns:r="http://schemas.openxmlformats.org/officeDocument/2006/relationships" xmlns:p="http://schemas.openxmlformats.org/presentationml/2006/main">
   <p:cSld>
+    <p:bg>
+      <p:bgRef idx="1001">
+        <a:schemeClr val="bg1"/>
+      </p:bgRef>
+    </p:bg>
     <p:spTree>
       <p:nvGrpSpPr>
         <p:cNvPr id="1" name=""/>
@@ -1126,6 +896,7 @@
         <a:solidFill>
           <a:srgbClr val="0D1B2A"/>
         </a:solidFill>
+        <a:effectLst/>
       </p:bgPr>
     </p:bg>
     <p:spTree>
@@ -1163,7 +934,7 @@
           <a:bodyPr wrap="square" rtlCol="0" anchor="ctr"/>
           <a:lstStyle/>
           <a:p>
-            <a:pPr algn="ctr" indent="0" marL="0">
+            <a:pPr marL="0" indent="0" algn="ctr">
               <a:buNone/>
             </a:pPr>
             <a:r>
@@ -1202,7 +973,7 @@
           <a:bodyPr wrap="square" rtlCol="0" anchor="ctr"/>
           <a:lstStyle/>
           <a:p>
-            <a:pPr algn="ctr" indent="0" marL="0">
+            <a:pPr marL="0" indent="0" algn="ctr">
               <a:buNone/>
             </a:pPr>
             <a:r>
@@ -1288,7 +1059,7 @@
           <a:bodyPr wrap="square" lIns="0" tIns="0" rIns="0" bIns="0" rtlCol="0" anchor="ctr"/>
           <a:lstStyle/>
           <a:p>
-            <a:pPr algn="ctr" indent="0" marL="0">
+            <a:pPr marL="0" indent="0" algn="ctr">
               <a:buNone/>
             </a:pPr>
             <a:r>
@@ -1349,7 +1120,7 @@
           <a:bodyPr wrap="square" lIns="0" tIns="0" rIns="0" bIns="0" rtlCol="0" anchor="ctr"/>
           <a:lstStyle/>
           <a:p>
-            <a:pPr algn="ctr" indent="0" marL="0">
+            <a:pPr marL="0" indent="0" algn="ctr">
               <a:buNone/>
             </a:pPr>
             <a:r>
@@ -1410,7 +1181,7 @@
           <a:bodyPr wrap="square" lIns="0" tIns="0" rIns="0" bIns="0" rtlCol="0" anchor="ctr"/>
           <a:lstStyle/>
           <a:p>
-            <a:pPr algn="ctr" indent="0" marL="0">
+            <a:pPr marL="0" indent="0" algn="ctr">
               <a:buNone/>
             </a:pPr>
             <a:r>
@@ -1471,7 +1242,7 @@
           <a:bodyPr wrap="square" lIns="0" tIns="0" rIns="0" bIns="0" rtlCol="0" anchor="ctr"/>
           <a:lstStyle/>
           <a:p>
-            <a:pPr algn="ctr" indent="0" marL="0">
+            <a:pPr marL="0" indent="0" algn="ctr">
               <a:buNone/>
             </a:pPr>
             <a:r>
@@ -1505,6 +1276,7 @@
         <a:solidFill>
           <a:srgbClr val="F4F8FB"/>
         </a:solidFill>
+        <a:effectLst/>
       </p:bgPr>
     </p:bg>
     <p:spTree>
@@ -1567,7 +1339,7 @@
           <a:bodyPr wrap="square" rtlCol="0" anchor="ctr"/>
           <a:lstStyle/>
           <a:p>
-            <a:pPr indent="0" marL="0">
+            <a:pPr marL="0" indent="0">
               <a:buNone/>
             </a:pPr>
             <a:r>
@@ -1604,7 +1376,7 @@
           </a:solidFill>
           <a:ln/>
           <a:effectLst>
-            <a:outerShdw sx="100000" sy="100000" kx="0" ky="0" algn="bl" rotWithShape="0" blurRad="101600" dist="25400" dir="8100000">
+            <a:outerShdw blurRad="101600" dist="25400" dir="8100000" algn="bl" rotWithShape="0">
               <a:srgbClr val="000000">
                 <a:alpha val="8000"/>
               </a:srgbClr>
@@ -1658,7 +1430,7 @@
           <a:bodyPr wrap="square" lIns="0" tIns="0" rIns="0" bIns="0" rtlCol="0" anchor="ctr"/>
           <a:lstStyle/>
           <a:p>
-            <a:pPr indent="0" marL="0">
+            <a:pPr marL="0" indent="0">
               <a:buNone/>
             </a:pPr>
             <a:r>
@@ -1697,7 +1469,7 @@
           <a:bodyPr wrap="square" lIns="0" tIns="0" rIns="0" bIns="0" rtlCol="0" anchor="ctr"/>
           <a:lstStyle/>
           <a:p>
-            <a:pPr indent="0" marL="0">
+            <a:pPr marL="0" indent="0">
               <a:buNone/>
             </a:pPr>
             <a:r>
@@ -1761,7 +1533,7 @@
           <a:bodyPr wrap="square" lIns="0" tIns="0" rIns="0" bIns="0" rtlCol="0" anchor="ctr"/>
           <a:lstStyle/>
           <a:p>
-            <a:pPr indent="0" marL="0">
+            <a:pPr marL="0" indent="0">
               <a:buNone/>
             </a:pPr>
             <a:r>
@@ -1798,7 +1570,7 @@
           </a:solidFill>
           <a:ln/>
           <a:effectLst>
-            <a:outerShdw sx="100000" sy="100000" kx="0" ky="0" algn="bl" rotWithShape="0" blurRad="101600" dist="25400" dir="8100000">
+            <a:outerShdw blurRad="101600" dist="25400" dir="8100000" algn="bl" rotWithShape="0">
               <a:srgbClr val="000000">
                 <a:alpha val="8000"/>
               </a:srgbClr>
@@ -1852,7 +1624,7 @@
           <a:bodyPr wrap="square" lIns="0" tIns="0" rIns="0" bIns="0" rtlCol="0" anchor="ctr"/>
           <a:lstStyle/>
           <a:p>
-            <a:pPr indent="0" marL="0">
+            <a:pPr marL="0" indent="0">
               <a:buNone/>
             </a:pPr>
             <a:r>
@@ -1891,7 +1663,7 @@
           <a:bodyPr wrap="square" lIns="0" tIns="0" rIns="0" bIns="0" rtlCol="0" anchor="ctr"/>
           <a:lstStyle/>
           <a:p>
-            <a:pPr indent="0" marL="0">
+            <a:pPr marL="0" indent="0">
               <a:buNone/>
             </a:pPr>
             <a:r>
@@ -1955,7 +1727,7 @@
           <a:bodyPr wrap="square" lIns="0" tIns="0" rIns="0" bIns="0" rtlCol="0" anchor="ctr"/>
           <a:lstStyle/>
           <a:p>
-            <a:pPr indent="0" marL="0">
+            <a:pPr marL="0" indent="0">
               <a:buNone/>
             </a:pPr>
             <a:r>
@@ -1992,7 +1764,7 @@
           </a:solidFill>
           <a:ln/>
           <a:effectLst>
-            <a:outerShdw sx="100000" sy="100000" kx="0" ky="0" algn="bl" rotWithShape="0" blurRad="101600" dist="25400" dir="8100000">
+            <a:outerShdw blurRad="101600" dist="25400" dir="8100000" algn="bl" rotWithShape="0">
               <a:srgbClr val="000000">
                 <a:alpha val="8000"/>
               </a:srgbClr>
@@ -2046,7 +1818,7 @@
           <a:bodyPr wrap="square" lIns="0" tIns="0" rIns="0" bIns="0" rtlCol="0" anchor="ctr"/>
           <a:lstStyle/>
           <a:p>
-            <a:pPr indent="0" marL="0">
+            <a:pPr marL="0" indent="0">
               <a:buNone/>
             </a:pPr>
             <a:r>
@@ -2085,7 +1857,7 @@
           <a:bodyPr wrap="square" lIns="0" tIns="0" rIns="0" bIns="0" rtlCol="0" anchor="ctr"/>
           <a:lstStyle/>
           <a:p>
-            <a:pPr indent="0" marL="0">
+            <a:pPr marL="0" indent="0">
               <a:buNone/>
             </a:pPr>
             <a:r>
@@ -2149,7 +1921,7 @@
           <a:bodyPr wrap="square" lIns="0" tIns="0" rIns="0" bIns="0" rtlCol="0" anchor="ctr"/>
           <a:lstStyle/>
           <a:p>
-            <a:pPr indent="0" marL="0">
+            <a:pPr marL="0" indent="0">
               <a:buNone/>
             </a:pPr>
             <a:r>
@@ -2186,7 +1958,7 @@
           </a:solidFill>
           <a:ln/>
           <a:effectLst>
-            <a:outerShdw sx="100000" sy="100000" kx="0" ky="0" algn="bl" rotWithShape="0" blurRad="101600" dist="25400" dir="8100000">
+            <a:outerShdw blurRad="101600" dist="25400" dir="8100000" algn="bl" rotWithShape="0">
               <a:srgbClr val="000000">
                 <a:alpha val="8000"/>
               </a:srgbClr>
@@ -2240,7 +2012,7 @@
           <a:bodyPr wrap="square" lIns="0" tIns="0" rIns="0" bIns="0" rtlCol="0" anchor="ctr"/>
           <a:lstStyle/>
           <a:p>
-            <a:pPr indent="0" marL="0">
+            <a:pPr marL="0" indent="0">
               <a:buNone/>
             </a:pPr>
             <a:r>
@@ -2279,7 +2051,7 @@
           <a:bodyPr wrap="square" lIns="0" tIns="0" rIns="0" bIns="0" rtlCol="0" anchor="ctr"/>
           <a:lstStyle/>
           <a:p>
-            <a:pPr indent="0" marL="0">
+            <a:pPr marL="0" indent="0">
               <a:buNone/>
             </a:pPr>
             <a:r>
@@ -2343,7 +2115,7 @@
           <a:bodyPr wrap="square" lIns="0" tIns="0" rIns="0" bIns="0" rtlCol="0" anchor="ctr"/>
           <a:lstStyle/>
           <a:p>
-            <a:pPr indent="0" marL="0">
+            <a:pPr marL="0" indent="0">
               <a:buNone/>
             </a:pPr>
             <a:r>
@@ -2377,6 +2149,7 @@
         <a:solidFill>
           <a:srgbClr val="F4F8FB"/>
         </a:solidFill>
+        <a:effectLst/>
       </p:bgPr>
     </p:bg>
     <p:spTree>
@@ -2439,7 +2212,7 @@
           <a:bodyPr wrap="square" rtlCol="0" anchor="ctr"/>
           <a:lstStyle/>
           <a:p>
-            <a:pPr indent="0" marL="0">
+            <a:pPr marL="0" indent="0">
               <a:buNone/>
             </a:pPr>
             <a:r>
@@ -2503,7 +2276,7 @@
           <a:bodyPr wrap="square" lIns="0" tIns="0" rIns="0" bIns="0" rtlCol="0" anchor="ctr"/>
           <a:lstStyle/>
           <a:p>
-            <a:pPr algn="ctr" indent="0" marL="0">
+            <a:pPr marL="0" indent="0" algn="ctr">
               <a:buNone/>
             </a:pPr>
             <a:r>
@@ -2562,7 +2335,7 @@
           <a:bodyPr wrap="square" lIns="0" tIns="0" rIns="0" bIns="0" rtlCol="0" anchor="ctr"/>
           <a:lstStyle/>
           <a:p>
-            <a:pPr indent="0" marL="0">
+            <a:pPr marL="0" indent="0">
               <a:buNone/>
             </a:pPr>
             <a:r>
@@ -2601,7 +2374,7 @@
           <a:bodyPr wrap="square" lIns="0" tIns="0" rIns="0" bIns="0" rtlCol="0" anchor="ctr"/>
           <a:lstStyle/>
           <a:p>
-            <a:pPr indent="0" marL="0">
+            <a:pPr marL="0" indent="0">
               <a:buNone/>
             </a:pPr>
             <a:r>
@@ -2640,7 +2413,7 @@
           <a:bodyPr wrap="square" lIns="0" tIns="0" rIns="0" bIns="0" rtlCol="0" anchor="ctr"/>
           <a:lstStyle/>
           <a:p>
-            <a:pPr indent="0" marL="0">
+            <a:pPr marL="0" indent="0">
               <a:buNone/>
             </a:pPr>
             <a:endParaRPr lang="en-US" sz="1050" dirty="0"/>
@@ -2668,7 +2441,7 @@
           <a:bodyPr wrap="square" lIns="0" tIns="0" rIns="0" bIns="0" rtlCol="0" anchor="ctr"/>
           <a:lstStyle/>
           <a:p>
-            <a:pPr indent="0" marL="0">
+            <a:pPr marL="0" indent="0">
               <a:buNone/>
             </a:pPr>
             <a:r>
@@ -2707,7 +2480,7 @@
           <a:bodyPr wrap="square" lIns="0" tIns="0" rIns="0" bIns="0" rtlCol="0" anchor="ctr"/>
           <a:lstStyle/>
           <a:p>
-            <a:pPr indent="0" marL="0">
+            <a:pPr marL="0" indent="0">
               <a:buNone/>
             </a:pPr>
             <a:r>
@@ -2746,7 +2519,7 @@
           <a:bodyPr wrap="square" lIns="0" tIns="0" rIns="0" bIns="0" rtlCol="0" anchor="ctr"/>
           <a:lstStyle/>
           <a:p>
-            <a:pPr indent="0" marL="0">
+            <a:pPr marL="0" indent="0">
               <a:buNone/>
             </a:pPr>
             <a:r>
@@ -2785,7 +2558,7 @@
           <a:bodyPr wrap="square" lIns="0" tIns="0" rIns="0" bIns="0" rtlCol="0" anchor="ctr"/>
           <a:lstStyle/>
           <a:p>
-            <a:pPr indent="0" marL="0">
+            <a:pPr marL="0" indent="0">
               <a:buNone/>
             </a:pPr>
             <a:endParaRPr lang="en-US" sz="1050" dirty="0"/>
@@ -2813,7 +2586,7 @@
           <a:bodyPr wrap="square" lIns="0" tIns="0" rIns="0" bIns="0" rtlCol="0" anchor="ctr"/>
           <a:lstStyle/>
           <a:p>
-            <a:pPr indent="0" marL="0">
+            <a:pPr marL="0" indent="0">
               <a:buNone/>
             </a:pPr>
             <a:r>
@@ -2852,7 +2625,7 @@
           <a:bodyPr wrap="square" lIns="0" tIns="0" rIns="0" bIns="0" rtlCol="0" anchor="ctr"/>
           <a:lstStyle/>
           <a:p>
-            <a:pPr indent="0" marL="0">
+            <a:pPr marL="0" indent="0">
               <a:buNone/>
             </a:pPr>
             <a:r>
@@ -2891,7 +2664,7 @@
           <a:bodyPr wrap="square" lIns="0" tIns="0" rIns="0" bIns="0" rtlCol="0" anchor="ctr"/>
           <a:lstStyle/>
           <a:p>
-            <a:pPr indent="0" marL="0">
+            <a:pPr marL="0" indent="0">
               <a:buNone/>
             </a:pPr>
             <a:r>
@@ -2930,7 +2703,7 @@
           <a:bodyPr wrap="square" lIns="0" tIns="0" rIns="0" bIns="0" rtlCol="0" anchor="ctr"/>
           <a:lstStyle/>
           <a:p>
-            <a:pPr indent="0" marL="0">
+            <a:pPr marL="0" indent="0">
               <a:buNone/>
             </a:pPr>
             <a:r>
@@ -2969,7 +2742,7 @@
           <a:bodyPr wrap="square" lIns="0" tIns="0" rIns="0" bIns="0" rtlCol="0" anchor="ctr"/>
           <a:lstStyle/>
           <a:p>
-            <a:pPr indent="0" marL="0">
+            <a:pPr marL="0" indent="0">
               <a:buNone/>
             </a:pPr>
             <a:r>
@@ -3008,7 +2781,7 @@
           <a:bodyPr wrap="square" lIns="0" tIns="0" rIns="0" bIns="0" rtlCol="0" anchor="ctr"/>
           <a:lstStyle/>
           <a:p>
-            <a:pPr indent="0" marL="0">
+            <a:pPr marL="0" indent="0">
               <a:buNone/>
             </a:pPr>
             <a:r>
@@ -3047,7 +2820,7 @@
           <a:bodyPr wrap="square" lIns="0" tIns="0" rIns="0" bIns="0" rtlCol="0" anchor="ctr"/>
           <a:lstStyle/>
           <a:p>
-            <a:pPr indent="0" marL="0">
+            <a:pPr marL="0" indent="0">
               <a:buNone/>
             </a:pPr>
             <a:r>
@@ -3111,7 +2884,7 @@
           <a:bodyPr wrap="square" lIns="0" tIns="0" rIns="0" bIns="0" rtlCol="0" anchor="ctr"/>
           <a:lstStyle/>
           <a:p>
-            <a:pPr algn="ctr" indent="0" marL="0">
+            <a:pPr marL="0" indent="0" algn="ctr">
               <a:buNone/>
             </a:pPr>
             <a:r>
@@ -3170,7 +2943,7 @@
           <a:bodyPr wrap="square" lIns="0" tIns="0" rIns="0" bIns="0" rtlCol="0" anchor="ctr"/>
           <a:lstStyle/>
           <a:p>
-            <a:pPr indent="0" marL="0">
+            <a:pPr marL="0" indent="0">
               <a:buNone/>
             </a:pPr>
             <a:r>
@@ -3209,7 +2982,7 @@
           <a:bodyPr wrap="square" lIns="0" tIns="0" rIns="0" bIns="0" rtlCol="0" anchor="ctr"/>
           <a:lstStyle/>
           <a:p>
-            <a:pPr indent="0" marL="0">
+            <a:pPr marL="0" indent="0">
               <a:buNone/>
             </a:pPr>
             <a:r>
@@ -3248,7 +3021,7 @@
           <a:bodyPr wrap="square" lIns="0" tIns="0" rIns="0" bIns="0" rtlCol="0" anchor="ctr"/>
           <a:lstStyle/>
           <a:p>
-            <a:pPr indent="0" marL="0">
+            <a:pPr marL="0" indent="0">
               <a:buNone/>
             </a:pPr>
             <a:endParaRPr lang="en-US" sz="1050" dirty="0"/>
@@ -3276,7 +3049,7 @@
           <a:bodyPr wrap="square" lIns="0" tIns="0" rIns="0" bIns="0" rtlCol="0" anchor="ctr"/>
           <a:lstStyle/>
           <a:p>
-            <a:pPr indent="0" marL="0">
+            <a:pPr marL="0" indent="0">
               <a:buNone/>
             </a:pPr>
             <a:r>
@@ -3315,7 +3088,7 @@
           <a:bodyPr wrap="square" lIns="0" tIns="0" rIns="0" bIns="0" rtlCol="0" anchor="ctr"/>
           <a:lstStyle/>
           <a:p>
-            <a:pPr indent="0" marL="0">
+            <a:pPr marL="0" indent="0">
               <a:buNone/>
             </a:pPr>
             <a:r>
@@ -3354,7 +3127,7 @@
           <a:bodyPr wrap="square" lIns="0" tIns="0" rIns="0" bIns="0" rtlCol="0" anchor="ctr"/>
           <a:lstStyle/>
           <a:p>
-            <a:pPr indent="0" marL="0">
+            <a:pPr marL="0" indent="0">
               <a:buNone/>
             </a:pPr>
             <a:r>
@@ -3393,7 +3166,7 @@
           <a:bodyPr wrap="square" lIns="0" tIns="0" rIns="0" bIns="0" rtlCol="0" anchor="ctr"/>
           <a:lstStyle/>
           <a:p>
-            <a:pPr indent="0" marL="0">
+            <a:pPr marL="0" indent="0">
               <a:buNone/>
             </a:pPr>
             <a:r>
@@ -3432,7 +3205,7 @@
           <a:bodyPr wrap="square" lIns="0" tIns="0" rIns="0" bIns="0" rtlCol="0" anchor="ctr"/>
           <a:lstStyle/>
           <a:p>
-            <a:pPr indent="0" marL="0">
+            <a:pPr marL="0" indent="0">
               <a:buNone/>
             </a:pPr>
             <a:endParaRPr lang="en-US" sz="1050" dirty="0"/>
@@ -3460,7 +3233,7 @@
           <a:bodyPr wrap="square" lIns="0" tIns="0" rIns="0" bIns="0" rtlCol="0" anchor="ctr"/>
           <a:lstStyle/>
           <a:p>
-            <a:pPr indent="0" marL="0">
+            <a:pPr marL="0" indent="0">
               <a:buNone/>
             </a:pPr>
             <a:r>
@@ -3499,7 +3272,7 @@
           <a:bodyPr wrap="square" lIns="0" tIns="0" rIns="0" bIns="0" rtlCol="0" anchor="ctr"/>
           <a:lstStyle/>
           <a:p>
-            <a:pPr indent="0" marL="0">
+            <a:pPr marL="0" indent="0">
               <a:buNone/>
             </a:pPr>
             <a:r>
@@ -3538,7 +3311,7 @@
           <a:bodyPr wrap="square" lIns="0" tIns="0" rIns="0" bIns="0" rtlCol="0" anchor="ctr"/>
           <a:lstStyle/>
           <a:p>
-            <a:pPr indent="0" marL="0">
+            <a:pPr marL="0" indent="0">
               <a:buNone/>
             </a:pPr>
             <a:r>
@@ -3577,7 +3350,7 @@
           <a:bodyPr wrap="square" lIns="0" tIns="0" rIns="0" bIns="0" rtlCol="0" anchor="ctr"/>
           <a:lstStyle/>
           <a:p>
-            <a:pPr indent="0" marL="0">
+            <a:pPr marL="0" indent="0">
               <a:buNone/>
             </a:pPr>
             <a:r>
@@ -3616,7 +3389,7 @@
           <a:bodyPr wrap="square" lIns="0" tIns="0" rIns="0" bIns="0" rtlCol="0" anchor="ctr"/>
           <a:lstStyle/>
           <a:p>
-            <a:pPr indent="0" marL="0">
+            <a:pPr marL="0" indent="0">
               <a:buNone/>
             </a:pPr>
             <a:r>
@@ -3655,7 +3428,7 @@
           <a:bodyPr wrap="square" lIns="0" tIns="0" rIns="0" bIns="0" rtlCol="0" anchor="ctr"/>
           <a:lstStyle/>
           <a:p>
-            <a:pPr indent="0" marL="0">
+            <a:pPr marL="0" indent="0">
               <a:buNone/>
             </a:pPr>
             <a:r>
@@ -3689,6 +3462,7 @@
         <a:solidFill>
           <a:srgbClr val="F4F8FB"/>
         </a:solidFill>
+        <a:effectLst/>
       </p:bgPr>
     </p:bg>
     <p:spTree>
@@ -3713,7 +3487,7 @@
         </p:nvSpPr>
         <p:spPr>
           <a:xfrm>
-            <a:off x="0" y="0"/>
+            <a:off x="0" y="-12274"/>
             <a:ext cx="9144000" cy="685800"/>
           </a:xfrm>
           <a:prstGeom prst="rect">
@@ -3751,7 +3525,7 @@
           <a:bodyPr wrap="square" rtlCol="0" anchor="ctr"/>
           <a:lstStyle/>
           <a:p>
-            <a:pPr indent="0" marL="0">
+            <a:pPr marL="0" indent="0">
               <a:buNone/>
             </a:pPr>
             <a:r>
@@ -3810,7 +3584,7 @@
           <a:bodyPr wrap="square" rtlCol="0" anchor="ctr"/>
           <a:lstStyle/>
           <a:p>
-            <a:pPr indent="0" marL="0">
+            <a:pPr marL="0" indent="0">
               <a:buNone/>
             </a:pPr>
             <a:r>
@@ -3869,7 +3643,7 @@
           <a:bodyPr wrap="square" lIns="0" tIns="0" rIns="0" bIns="0" rtlCol="0" anchor="ctr"/>
           <a:lstStyle/>
           <a:p>
-            <a:pPr indent="0" marL="0">
+            <a:pPr marL="0" indent="0">
               <a:buNone/>
             </a:pPr>
             <a:r>
@@ -3908,7 +3682,7 @@
           <a:bodyPr wrap="square" lIns="0" tIns="0" rIns="0" bIns="0" rtlCol="0" anchor="ctr"/>
           <a:lstStyle/>
           <a:p>
-            <a:pPr indent="0" marL="0">
+            <a:pPr marL="0" indent="0">
               <a:buNone/>
             </a:pPr>
             <a:r>
@@ -3947,7 +3721,7 @@
           <a:bodyPr wrap="square" lIns="0" tIns="0" rIns="0" bIns="0" rtlCol="0" anchor="ctr"/>
           <a:lstStyle/>
           <a:p>
-            <a:pPr indent="0" marL="0">
+            <a:pPr marL="0" indent="0">
               <a:buNone/>
             </a:pPr>
             <a:r>
@@ -3986,7 +3760,7 @@
           <a:bodyPr wrap="square" lIns="0" tIns="0" rIns="0" bIns="0" rtlCol="0" anchor="ctr"/>
           <a:lstStyle/>
           <a:p>
-            <a:pPr indent="0" marL="0">
+            <a:pPr marL="0" indent="0">
               <a:buNone/>
             </a:pPr>
             <a:endParaRPr lang="en-US" sz="1000" dirty="0"/>
@@ -4014,7 +3788,7 @@
           <a:bodyPr wrap="square" lIns="0" tIns="0" rIns="0" bIns="0" rtlCol="0" anchor="ctr"/>
           <a:lstStyle/>
           <a:p>
-            <a:pPr indent="0" marL="0">
+            <a:pPr marL="0" indent="0">
               <a:buNone/>
             </a:pPr>
             <a:r>
@@ -4053,7 +3827,7 @@
           <a:bodyPr wrap="square" lIns="0" tIns="0" rIns="0" bIns="0" rtlCol="0" anchor="ctr"/>
           <a:lstStyle/>
           <a:p>
-            <a:pPr indent="0" marL="0">
+            <a:pPr marL="0" indent="0">
               <a:buNone/>
             </a:pPr>
             <a:r>
@@ -4092,7 +3866,7 @@
           <a:bodyPr wrap="square" lIns="0" tIns="0" rIns="0" bIns="0" rtlCol="0" anchor="ctr"/>
           <a:lstStyle/>
           <a:p>
-            <a:pPr indent="0" marL="0">
+            <a:pPr marL="0" indent="0">
               <a:buNone/>
             </a:pPr>
             <a:r>
@@ -4131,7 +3905,7 @@
           <a:bodyPr wrap="square" lIns="0" tIns="0" rIns="0" bIns="0" rtlCol="0" anchor="ctr"/>
           <a:lstStyle/>
           <a:p>
-            <a:pPr indent="0" marL="0">
+            <a:pPr marL="0" indent="0">
               <a:buNone/>
             </a:pPr>
             <a:r>
@@ -4170,7 +3944,7 @@
           <a:bodyPr wrap="square" lIns="0" tIns="0" rIns="0" bIns="0" rtlCol="0" anchor="ctr"/>
           <a:lstStyle/>
           <a:p>
-            <a:pPr indent="0" marL="0">
+            <a:pPr marL="0" indent="0">
               <a:buNone/>
             </a:pPr>
             <a:endParaRPr lang="en-US" sz="1000" dirty="0"/>
@@ -4198,7 +3972,7 @@
           <a:bodyPr wrap="square" lIns="0" tIns="0" rIns="0" bIns="0" rtlCol="0" anchor="ctr"/>
           <a:lstStyle/>
           <a:p>
-            <a:pPr indent="0" marL="0">
+            <a:pPr marL="0" indent="0">
               <a:buNone/>
             </a:pPr>
             <a:r>
@@ -4237,7 +4011,7 @@
           <a:bodyPr wrap="square" lIns="0" tIns="0" rIns="0" bIns="0" rtlCol="0" anchor="ctr"/>
           <a:lstStyle/>
           <a:p>
-            <a:pPr indent="0" marL="0">
+            <a:pPr marL="0" indent="0">
               <a:buNone/>
             </a:pPr>
             <a:r>
@@ -4276,7 +4050,7 @@
           <a:bodyPr wrap="square" lIns="0" tIns="0" rIns="0" bIns="0" rtlCol="0" anchor="ctr"/>
           <a:lstStyle/>
           <a:p>
-            <a:pPr indent="0" marL="0">
+            <a:pPr marL="0" indent="0">
               <a:buNone/>
             </a:pPr>
             <a:r>
@@ -4315,7 +4089,7 @@
           <a:bodyPr wrap="square" lIns="0" tIns="0" rIns="0" bIns="0" rtlCol="0" anchor="ctr"/>
           <a:lstStyle/>
           <a:p>
-            <a:pPr indent="0" marL="0">
+            <a:pPr marL="0" indent="0">
               <a:buNone/>
             </a:pPr>
             <a:r>
@@ -4354,7 +4128,7 @@
           <a:bodyPr wrap="square" lIns="0" tIns="0" rIns="0" bIns="0" rtlCol="0" anchor="ctr"/>
           <a:lstStyle/>
           <a:p>
-            <a:pPr indent="0" marL="0">
+            <a:pPr marL="0" indent="0">
               <a:buNone/>
             </a:pPr>
             <a:r>
@@ -4393,7 +4167,7 @@
           <a:bodyPr wrap="square" lIns="0" tIns="0" rIns="0" bIns="0" rtlCol="0" anchor="ctr"/>
           <a:lstStyle/>
           <a:p>
-            <a:pPr indent="0" marL="0">
+            <a:pPr marL="0" indent="0">
               <a:buNone/>
             </a:pPr>
             <a:r>
@@ -4432,7 +4206,7 @@
           <a:bodyPr wrap="square" lIns="0" tIns="0" rIns="0" bIns="0" rtlCol="0" anchor="ctr"/>
           <a:lstStyle/>
           <a:p>
-            <a:pPr indent="0" marL="0">
+            <a:pPr marL="0" indent="0">
               <a:buNone/>
             </a:pPr>
             <a:r>
@@ -4471,7 +4245,7 @@
           <a:bodyPr wrap="square" lIns="0" tIns="0" rIns="0" bIns="0" rtlCol="0" anchor="ctr"/>
           <a:lstStyle/>
           <a:p>
-            <a:pPr indent="0" marL="0">
+            <a:pPr marL="0" indent="0">
               <a:buNone/>
             </a:pPr>
             <a:r>
@@ -4510,7 +4284,7 @@
           <a:bodyPr wrap="square" lIns="0" tIns="0" rIns="0" bIns="0" rtlCol="0" anchor="ctr"/>
           <a:lstStyle/>
           <a:p>
-            <a:pPr indent="0" marL="0">
+            <a:pPr marL="0" indent="0">
               <a:buNone/>
             </a:pPr>
             <a:r>
@@ -4547,7 +4321,7 @@
           </a:solidFill>
           <a:ln/>
           <a:effectLst>
-            <a:outerShdw sx="100000" sy="100000" kx="0" ky="0" algn="bl" rotWithShape="0" blurRad="76200" dist="25400" dir="8100000">
+            <a:outerShdw blurRad="76200" dist="25400" dir="8100000" algn="bl" rotWithShape="0">
               <a:srgbClr val="000000">
                 <a:alpha val="8000"/>
               </a:srgbClr>
@@ -4601,7 +4375,7 @@
           <a:bodyPr wrap="square" lIns="0" tIns="0" rIns="0" bIns="0" rtlCol="0" anchor="ctr"/>
           <a:lstStyle/>
           <a:p>
-            <a:pPr algn="ctr" indent="0" marL="0">
+            <a:pPr marL="0" indent="0" algn="ctr">
               <a:buNone/>
             </a:pPr>
             <a:r>
@@ -4640,7 +4414,7 @@
           <a:bodyPr wrap="square" lIns="0" tIns="0" rIns="0" bIns="0" rtlCol="0" anchor="ctr"/>
           <a:lstStyle/>
           <a:p>
-            <a:pPr indent="0" marL="0">
+            <a:pPr marL="0" indent="0">
               <a:buNone/>
             </a:pPr>
             <a:r>
@@ -4679,7 +4453,7 @@
           <a:bodyPr wrap="square" lIns="0" tIns="0" rIns="0" bIns="0" rtlCol="0" anchor="ctr"/>
           <a:lstStyle/>
           <a:p>
-            <a:pPr indent="0" marL="0">
+            <a:pPr marL="0" indent="0">
               <a:buNone/>
             </a:pPr>
             <a:r>
@@ -4716,7 +4490,7 @@
           </a:solidFill>
           <a:ln/>
           <a:effectLst>
-            <a:outerShdw sx="100000" sy="100000" kx="0" ky="0" algn="bl" rotWithShape="0" blurRad="76200" dist="25400" dir="8100000">
+            <a:outerShdw blurRad="76200" dist="25400" dir="8100000" algn="bl" rotWithShape="0">
               <a:srgbClr val="000000">
                 <a:alpha val="8000"/>
               </a:srgbClr>
@@ -4770,7 +4544,7 @@
           <a:bodyPr wrap="square" lIns="0" tIns="0" rIns="0" bIns="0" rtlCol="0" anchor="ctr"/>
           <a:lstStyle/>
           <a:p>
-            <a:pPr algn="ctr" indent="0" marL="0">
+            <a:pPr marL="0" indent="0" algn="ctr">
               <a:buNone/>
             </a:pPr>
             <a:r>
@@ -4809,7 +4583,7 @@
           <a:bodyPr wrap="square" lIns="0" tIns="0" rIns="0" bIns="0" rtlCol="0" anchor="ctr"/>
           <a:lstStyle/>
           <a:p>
-            <a:pPr indent="0" marL="0">
+            <a:pPr marL="0" indent="0">
               <a:buNone/>
             </a:pPr>
             <a:r>
@@ -4848,7 +4622,7 @@
           <a:bodyPr wrap="square" lIns="0" tIns="0" rIns="0" bIns="0" rtlCol="0" anchor="ctr"/>
           <a:lstStyle/>
           <a:p>
-            <a:pPr indent="0" marL="0">
+            <a:pPr marL="0" indent="0">
               <a:buNone/>
             </a:pPr>
             <a:r>
@@ -4885,7 +4659,7 @@
           </a:solidFill>
           <a:ln/>
           <a:effectLst>
-            <a:outerShdw sx="100000" sy="100000" kx="0" ky="0" algn="bl" rotWithShape="0" blurRad="76200" dist="25400" dir="8100000">
+            <a:outerShdw blurRad="76200" dist="25400" dir="8100000" algn="bl" rotWithShape="0">
               <a:srgbClr val="000000">
                 <a:alpha val="8000"/>
               </a:srgbClr>
@@ -4939,7 +4713,7 @@
           <a:bodyPr wrap="square" lIns="0" tIns="0" rIns="0" bIns="0" rtlCol="0" anchor="ctr"/>
           <a:lstStyle/>
           <a:p>
-            <a:pPr algn="ctr" indent="0" marL="0">
+            <a:pPr marL="0" indent="0" algn="ctr">
               <a:buNone/>
             </a:pPr>
             <a:r>
@@ -4978,7 +4752,7 @@
           <a:bodyPr wrap="square" lIns="0" tIns="0" rIns="0" bIns="0" rtlCol="0" anchor="ctr"/>
           <a:lstStyle/>
           <a:p>
-            <a:pPr indent="0" marL="0">
+            <a:pPr marL="0" indent="0">
               <a:buNone/>
             </a:pPr>
             <a:r>
@@ -5017,7 +4791,7 @@
           <a:bodyPr wrap="square" lIns="0" tIns="0" rIns="0" bIns="0" rtlCol="0" anchor="ctr"/>
           <a:lstStyle/>
           <a:p>
-            <a:pPr indent="0" marL="0">
+            <a:pPr marL="0" indent="0">
               <a:buNone/>
             </a:pPr>
             <a:r>
@@ -5054,7 +4828,7 @@
           </a:solidFill>
           <a:ln/>
           <a:effectLst>
-            <a:outerShdw sx="100000" sy="100000" kx="0" ky="0" algn="bl" rotWithShape="0" blurRad="76200" dist="25400" dir="8100000">
+            <a:outerShdw blurRad="76200" dist="25400" dir="8100000" algn="bl" rotWithShape="0">
               <a:srgbClr val="000000">
                 <a:alpha val="8000"/>
               </a:srgbClr>
@@ -5108,7 +4882,7 @@
           <a:bodyPr wrap="square" lIns="0" tIns="0" rIns="0" bIns="0" rtlCol="0" anchor="ctr"/>
           <a:lstStyle/>
           <a:p>
-            <a:pPr algn="ctr" indent="0" marL="0">
+            <a:pPr marL="0" indent="0" algn="ctr">
               <a:buNone/>
             </a:pPr>
             <a:r>
@@ -5147,7 +4921,7 @@
           <a:bodyPr wrap="square" lIns="0" tIns="0" rIns="0" bIns="0" rtlCol="0" anchor="ctr"/>
           <a:lstStyle/>
           <a:p>
-            <a:pPr indent="0" marL="0">
+            <a:pPr marL="0" indent="0">
               <a:buNone/>
             </a:pPr>
             <a:r>
@@ -5186,7 +4960,7 @@
           <a:bodyPr wrap="square" lIns="0" tIns="0" rIns="0" bIns="0" rtlCol="0" anchor="ctr"/>
           <a:lstStyle/>
           <a:p>
-            <a:pPr indent="0" marL="0">
+            <a:pPr marL="0" indent="0">
               <a:buNone/>
             </a:pPr>
             <a:r>
@@ -5203,7 +4977,7 @@
             <a:endParaRPr lang="en-US" sz="950" dirty="0"/>
           </a:p>
           <a:p>
-            <a:pPr indent="0" marL="0">
+            <a:pPr marL="0" indent="0">
               <a:buNone/>
             </a:pPr>
             <a:r>
@@ -5267,7 +5041,7 @@
           <a:bodyPr wrap="square" rtlCol="0" anchor="ctr"/>
           <a:lstStyle/>
           <a:p>
-            <a:pPr indent="0" marL="0">
+            <a:pPr marL="0" indent="0">
               <a:buNone/>
             </a:pPr>
             <a:r>
@@ -5586,4 +5360,265 @@
     </a:ext>
   </a:extLst>
 </a:theme>
+</file>
+
+<file path=ppt/theme/theme2.xml><?xml version="1.0" encoding="utf-8"?>
+<a:theme xmlns:a="http://schemas.openxmlformats.org/drawingml/2006/main" name="Office Theme">
+  <a:themeElements>
+    <a:clrScheme name="Office">
+      <a:dk1>
+        <a:sysClr val="windowText" lastClr="000000"/>
+      </a:dk1>
+      <a:lt1>
+        <a:sysClr val="window" lastClr="FFFFFF"/>
+      </a:lt1>
+      <a:dk2>
+        <a:srgbClr val="44546A"/>
+      </a:dk2>
+      <a:lt2>
+        <a:srgbClr val="E7E6E6"/>
+      </a:lt2>
+      <a:accent1>
+        <a:srgbClr val="5B9BD5"/>
+      </a:accent1>
+      <a:accent2>
+        <a:srgbClr val="ED7D31"/>
+      </a:accent2>
+      <a:accent3>
+        <a:srgbClr val="A5A5A5"/>
+      </a:accent3>
+      <a:accent4>
+        <a:srgbClr val="FFC000"/>
+      </a:accent4>
+      <a:accent5>
+        <a:srgbClr val="4472C4"/>
+      </a:accent5>
+      <a:accent6>
+        <a:srgbClr val="70AD47"/>
+      </a:accent6>
+      <a:hlink>
+        <a:srgbClr val="0563C1"/>
+      </a:hlink>
+      <a:folHlink>
+        <a:srgbClr val="954F72"/>
+      </a:folHlink>
+    </a:clrScheme>
+    <a:fontScheme name="Office">
+      <a:majorFont>
+        <a:latin typeface="Calibri Light" panose="020F0302020204030204"/>
+        <a:ea typeface=""/>
+        <a:cs typeface=""/>
+        <a:font script="Jpan" typeface="游ゴシック Light"/>
+        <a:font script="Hang" typeface="맑은 고딕"/>
+        <a:font script="Hans" typeface="等线 Light"/>
+        <a:font script="Hant" typeface="新細明體"/>
+        <a:font script="Arab" typeface="Times New Roman"/>
+        <a:font script="Hebr" typeface="Times New Roman"/>
+        <a:font script="Thai" typeface="Angsana New"/>
+        <a:font script="Ethi" typeface="Nyala"/>
+        <a:font script="Beng" typeface="Vrinda"/>
+        <a:font script="Gujr" typeface="Shruti"/>
+        <a:font script="Khmr" typeface="MoolBoran"/>
+        <a:font script="Knda" typeface="Tunga"/>
+        <a:font script="Guru" typeface="Raavi"/>
+        <a:font script="Cans" typeface="Euphemia"/>
+        <a:font script="Cher" typeface="Plantagenet Cherokee"/>
+        <a:font script="Yiii" typeface="Microsoft Yi Baiti"/>
+        <a:font script="Tibt" typeface="Microsoft Himalaya"/>
+        <a:font script="Thaa" typeface="MV Boli"/>
+        <a:font script="Deva" typeface="Mangal"/>
+        <a:font script="Telu" typeface="Gautami"/>
+        <a:font script="Taml" typeface="Latha"/>
+        <a:font script="Syrc" typeface="Estrangelo Edessa"/>
+        <a:font script="Orya" typeface="Kalinga"/>
+        <a:font script="Mlym" typeface="Kartika"/>
+        <a:font script="Laoo" typeface="DokChampa"/>
+        <a:font script="Sinh" typeface="Iskoola Pota"/>
+        <a:font script="Mong" typeface="Mongolian Baiti"/>
+        <a:font script="Viet" typeface="Times New Roman"/>
+        <a:font script="Uigh" typeface="Microsoft Uighur"/>
+        <a:font script="Geor" typeface="Sylfaen"/>
+      </a:majorFont>
+      <a:minorFont>
+        <a:latin typeface="Calibri" panose="020F0502020204030204"/>
+        <a:ea typeface=""/>
+        <a:cs typeface=""/>
+        <a:font script="Jpan" typeface="游ゴシック"/>
+        <a:font script="Hang" typeface="맑은 고딕"/>
+        <a:font script="Hans" typeface="等线"/>
+        <a:font script="Hant" typeface="新細明體"/>
+        <a:font script="Arab" typeface="Arial"/>
+        <a:font script="Hebr" typeface="Arial"/>
+        <a:font script="Thai" typeface="Cordia New"/>
+        <a:font script="Ethi" typeface="Nyala"/>
+        <a:font script="Beng" typeface="Vrinda"/>
+        <a:font script="Gujr" typeface="Shruti"/>
+        <a:font script="Khmr" typeface="DaunPenh"/>
+        <a:font script="Knda" typeface="Tunga"/>
+        <a:font script="Guru" typeface="Raavi"/>
+        <a:font script="Cans" typeface="Euphemia"/>
+        <a:font script="Cher" typeface="Plantagenet Cherokee"/>
+        <a:font script="Yiii" typeface="Microsoft Yi Baiti"/>
+        <a:font script="Tibt" typeface="Microsoft Himalaya"/>
+        <a:font script="Thaa" typeface="MV Boli"/>
+        <a:font script="Deva" typeface="Mangal"/>
+        <a:font script="Telu" typeface="Gautami"/>
+        <a:font script="Taml" typeface="Latha"/>
+        <a:font script="Syrc" typeface="Estrangelo Edessa"/>
+        <a:font script="Orya" typeface="Kalinga"/>
+        <a:font script="Mlym" typeface="Kartika"/>
+        <a:font script="Laoo" typeface="DokChampa"/>
+        <a:font script="Sinh" typeface="Iskoola Pota"/>
+        <a:font script="Mong" typeface="Mongolian Baiti"/>
+        <a:font script="Viet" typeface="Arial"/>
+        <a:font script="Uigh" typeface="Microsoft Uighur"/>
+        <a:font script="Geor" typeface="Sylfaen"/>
+      </a:minorFont>
+    </a:fontScheme>
+    <a:fmtScheme name="Office">
+      <a:fillStyleLst>
+        <a:solidFill>
+          <a:schemeClr val="phClr"/>
+        </a:solidFill>
+        <a:gradFill rotWithShape="1">
+          <a:gsLst>
+            <a:gs pos="0">
+              <a:schemeClr val="phClr">
+                <a:lumMod val="110000"/>
+                <a:satMod val="105000"/>
+                <a:tint val="67000"/>
+              </a:schemeClr>
+            </a:gs>
+            <a:gs pos="50000">
+              <a:schemeClr val="phClr">
+                <a:lumMod val="105000"/>
+                <a:satMod val="103000"/>
+                <a:tint val="73000"/>
+              </a:schemeClr>
+            </a:gs>
+            <a:gs pos="100000">
+              <a:schemeClr val="phClr">
+                <a:lumMod val="105000"/>
+                <a:satMod val="109000"/>
+                <a:tint val="81000"/>
+              </a:schemeClr>
+            </a:gs>
+          </a:gsLst>
+          <a:lin ang="5400000" scaled="0"/>
+        </a:gradFill>
+        <a:gradFill rotWithShape="1">
+          <a:gsLst>
+            <a:gs pos="0">
+              <a:schemeClr val="phClr">
+                <a:satMod val="103000"/>
+                <a:lumMod val="102000"/>
+                <a:tint val="94000"/>
+              </a:schemeClr>
+            </a:gs>
+            <a:gs pos="50000">
+              <a:schemeClr val="phClr">
+                <a:satMod val="110000"/>
+                <a:lumMod val="100000"/>
+                <a:shade val="100000"/>
+              </a:schemeClr>
+            </a:gs>
+            <a:gs pos="100000">
+              <a:schemeClr val="phClr">
+                <a:lumMod val="99000"/>
+                <a:satMod val="120000"/>
+                <a:shade val="78000"/>
+              </a:schemeClr>
+            </a:gs>
+          </a:gsLst>
+          <a:lin ang="5400000" scaled="0"/>
+        </a:gradFill>
+      </a:fillStyleLst>
+      <a:lnStyleLst>
+        <a:ln w="6350" cap="flat" cmpd="sng" algn="ctr">
+          <a:solidFill>
+            <a:schemeClr val="phClr"/>
+          </a:solidFill>
+          <a:prstDash val="solid"/>
+          <a:miter lim="800000"/>
+        </a:ln>
+        <a:ln w="12700" cap="flat" cmpd="sng" algn="ctr">
+          <a:solidFill>
+            <a:schemeClr val="phClr"/>
+          </a:solidFill>
+          <a:prstDash val="solid"/>
+          <a:miter lim="800000"/>
+        </a:ln>
+        <a:ln w="19050" cap="flat" cmpd="sng" algn="ctr">
+          <a:solidFill>
+            <a:schemeClr val="phClr"/>
+          </a:solidFill>
+          <a:prstDash val="solid"/>
+          <a:miter lim="800000"/>
+        </a:ln>
+      </a:lnStyleLst>
+      <a:effectStyleLst>
+        <a:effectStyle>
+          <a:effectLst/>
+        </a:effectStyle>
+        <a:effectStyle>
+          <a:effectLst/>
+        </a:effectStyle>
+        <a:effectStyle>
+          <a:effectLst>
+            <a:outerShdw blurRad="57150" dist="19050" dir="5400000" algn="ctr" rotWithShape="0">
+              <a:srgbClr val="000000">
+                <a:alpha val="63000"/>
+              </a:srgbClr>
+            </a:outerShdw>
+          </a:effectLst>
+        </a:effectStyle>
+      </a:effectStyleLst>
+      <a:bgFillStyleLst>
+        <a:solidFill>
+          <a:schemeClr val="phClr"/>
+        </a:solidFill>
+        <a:solidFill>
+          <a:schemeClr val="phClr">
+            <a:tint val="95000"/>
+            <a:satMod val="170000"/>
+          </a:schemeClr>
+        </a:solidFill>
+        <a:gradFill rotWithShape="1">
+          <a:gsLst>
+            <a:gs pos="0">
+              <a:schemeClr val="phClr">
+                <a:tint val="93000"/>
+                <a:satMod val="150000"/>
+                <a:shade val="98000"/>
+                <a:lumMod val="102000"/>
+              </a:schemeClr>
+            </a:gs>
+            <a:gs pos="50000">
+              <a:schemeClr val="phClr">
+                <a:tint val="98000"/>
+                <a:satMod val="130000"/>
+                <a:shade val="90000"/>
+                <a:lumMod val="103000"/>
+              </a:schemeClr>
+            </a:gs>
+            <a:gs pos="100000">
+              <a:schemeClr val="phClr">
+                <a:shade val="63000"/>
+                <a:satMod val="120000"/>
+              </a:schemeClr>
+            </a:gs>
+          </a:gsLst>
+          <a:lin ang="5400000" scaled="0"/>
+        </a:gradFill>
+      </a:bgFillStyleLst>
+    </a:fmtScheme>
+  </a:themeElements>
+  <a:objectDefaults/>
+  <a:extraClrSchemeLst/>
+  <a:extLst>
+    <a:ext uri="{05A4C25C-085E-4340-85A3-A5531E510DB2}">
+      <thm15:themeFamily xmlns:thm15="http://schemas.microsoft.com/office/thememl/2012/main" name="Office Theme" id="{62F939B6-93AF-4DB8-9C6B-D6C7DFDC589F}" vid="{4A3C46E8-61CC-4603-A589-7422A47A8E4A}"/>
+    </a:ext>
+  </a:extLst>
+</a:theme>
 </file>